--- a/atelier/atelier-x02-pinterest-pin.pptx
+++ b/atelier/atelier-x02-pinterest-pin.pptx
@@ -3316,7 +3316,7 @@
         </p:nvSpPr>
         <p:spPr>
           <a:xfrm>
-            <a:off x="762000" y="5528816"/>
+            <a:off x="762000" y="5461695"/>
             <a:ext cx="8001000" cy="9525"/>
           </a:xfrm>
           <a:prstGeom prst="rect">
@@ -3360,7 +3360,7 @@
         </p:nvSpPr>
         <p:spPr>
           <a:xfrm>
-            <a:off x="762000" y="6276529"/>
+            <a:off x="762000" y="6209407"/>
             <a:ext cx="8001000" cy="9525"/>
           </a:xfrm>
           <a:prstGeom prst="rect">
@@ -3404,7 +3404,7 @@
         </p:nvSpPr>
         <p:spPr>
           <a:xfrm>
-            <a:off x="762000" y="7024241"/>
+            <a:off x="762000" y="6957120"/>
             <a:ext cx="8001000" cy="9525"/>
           </a:xfrm>
           <a:prstGeom prst="rect">
@@ -3448,7 +3448,7 @@
         </p:nvSpPr>
         <p:spPr>
           <a:xfrm>
-            <a:off x="762000" y="7771954"/>
+            <a:off x="762000" y="7704832"/>
             <a:ext cx="8001000" cy="9525"/>
           </a:xfrm>
           <a:prstGeom prst="rect">
@@ -3492,7 +3492,7 @@
         </p:nvSpPr>
         <p:spPr>
           <a:xfrm>
-            <a:off x="762000" y="8519666"/>
+            <a:off x="762000" y="8452545"/>
             <a:ext cx="8001000" cy="9525"/>
           </a:xfrm>
           <a:prstGeom prst="rect">
@@ -3536,7 +3536,7 @@
         </p:nvSpPr>
         <p:spPr>
           <a:xfrm>
-            <a:off x="762000" y="12963525"/>
+            <a:off x="762000" y="13007429"/>
             <a:ext cx="8001000" cy="9525"/>
           </a:xfrm>
           <a:prstGeom prst="rect">
@@ -3767,7 +3767,7 @@
         </p:nvSpPr>
         <p:spPr>
           <a:xfrm>
-            <a:off x="762000" y="3466654"/>
+            <a:off x="762000" y="3428554"/>
             <a:ext cx="8947785" cy="923925"/>
           </a:xfrm>
           <a:prstGeom prst="rect">
@@ -3781,7 +3781,7 @@
           <a:p>
             <a:pPr algn="l">
               <a:lnSpc>
-                <a:spcPct val="100000"/>
+                <a:spcPct val="92000"/>
               </a:lnSpc>
             </a:pPr>
             <a:r>
@@ -3806,7 +3806,7 @@
         </p:nvSpPr>
         <p:spPr>
           <a:xfrm>
-            <a:off x="762000" y="4943029"/>
+            <a:off x="762000" y="4875907"/>
             <a:ext cx="716280" cy="230386"/>
           </a:xfrm>
           <a:prstGeom prst="rect">
@@ -3845,7 +3845,7 @@
         </p:nvSpPr>
         <p:spPr>
           <a:xfrm>
-            <a:off x="1143000" y="4943029"/>
+            <a:off x="1143000" y="4875907"/>
             <a:ext cx="4529138" cy="219075"/>
           </a:xfrm>
           <a:prstGeom prst="rect">
@@ -3880,7 +3880,7 @@
         </p:nvSpPr>
         <p:spPr>
           <a:xfrm>
-            <a:off x="1143000" y="5190679"/>
+            <a:off x="1143000" y="5123557"/>
             <a:ext cx="4529138" cy="185738"/>
           </a:xfrm>
           <a:prstGeom prst="rect">
@@ -3919,7 +3919,7 @@
         </p:nvSpPr>
         <p:spPr>
           <a:xfrm>
-            <a:off x="762000" y="5690741"/>
+            <a:off x="762000" y="5623620"/>
             <a:ext cx="716280" cy="230386"/>
           </a:xfrm>
           <a:prstGeom prst="rect">
@@ -3958,7 +3958,7 @@
         </p:nvSpPr>
         <p:spPr>
           <a:xfrm>
-            <a:off x="1143000" y="5690741"/>
+            <a:off x="1143000" y="5623620"/>
             <a:ext cx="5013722" cy="219075"/>
           </a:xfrm>
           <a:prstGeom prst="rect">
@@ -3993,7 +3993,7 @@
         </p:nvSpPr>
         <p:spPr>
           <a:xfrm>
-            <a:off x="1143000" y="5938391"/>
+            <a:off x="1143000" y="5871270"/>
             <a:ext cx="5013722" cy="185738"/>
           </a:xfrm>
           <a:prstGeom prst="rect">
@@ -4032,7 +4032,7 @@
         </p:nvSpPr>
         <p:spPr>
           <a:xfrm>
-            <a:off x="762000" y="6438454"/>
+            <a:off x="762000" y="6371332"/>
             <a:ext cx="716280" cy="230386"/>
           </a:xfrm>
           <a:prstGeom prst="rect">
@@ -4071,7 +4071,7 @@
         </p:nvSpPr>
         <p:spPr>
           <a:xfrm>
-            <a:off x="1143000" y="6438454"/>
+            <a:off x="1143000" y="6371332"/>
             <a:ext cx="5204936" cy="219075"/>
           </a:xfrm>
           <a:prstGeom prst="rect">
@@ -4106,7 +4106,7 @@
         </p:nvSpPr>
         <p:spPr>
           <a:xfrm>
-            <a:off x="1143000" y="6686104"/>
+            <a:off x="1143000" y="6618982"/>
             <a:ext cx="5204936" cy="185738"/>
           </a:xfrm>
           <a:prstGeom prst="rect">
@@ -4145,7 +4145,7 @@
         </p:nvSpPr>
         <p:spPr>
           <a:xfrm>
-            <a:off x="762000" y="7186166"/>
+            <a:off x="762000" y="7119045"/>
             <a:ext cx="716280" cy="230386"/>
           </a:xfrm>
           <a:prstGeom prst="rect">
@@ -4184,7 +4184,7 @@
         </p:nvSpPr>
         <p:spPr>
           <a:xfrm>
-            <a:off x="1143000" y="7186166"/>
+            <a:off x="1143000" y="7119045"/>
             <a:ext cx="5204222" cy="219075"/>
           </a:xfrm>
           <a:prstGeom prst="rect">
@@ -4219,7 +4219,7 @@
         </p:nvSpPr>
         <p:spPr>
           <a:xfrm>
-            <a:off x="1143000" y="7433816"/>
+            <a:off x="1143000" y="7366695"/>
             <a:ext cx="5204222" cy="185738"/>
           </a:xfrm>
           <a:prstGeom prst="rect">
@@ -4258,7 +4258,7 @@
         </p:nvSpPr>
         <p:spPr>
           <a:xfrm>
-            <a:off x="762000" y="7933879"/>
+            <a:off x="762000" y="7866757"/>
             <a:ext cx="716280" cy="230386"/>
           </a:xfrm>
           <a:prstGeom prst="rect">
@@ -4297,7 +4297,7 @@
         </p:nvSpPr>
         <p:spPr>
           <a:xfrm>
-            <a:off x="1143000" y="7933879"/>
+            <a:off x="1143000" y="7866757"/>
             <a:ext cx="5171122" cy="219075"/>
           </a:xfrm>
           <a:prstGeom prst="rect">
@@ -4332,7 +4332,7 @@
         </p:nvSpPr>
         <p:spPr>
           <a:xfrm>
-            <a:off x="1143000" y="8181529"/>
+            <a:off x="1143000" y="8114407"/>
             <a:ext cx="5171122" cy="185738"/>
           </a:xfrm>
           <a:prstGeom prst="rect">
@@ -4371,8 +4371,8 @@
         </p:nvSpPr>
         <p:spPr>
           <a:xfrm>
-            <a:off x="762000" y="13163550"/>
-            <a:ext cx="2268379" cy="219075"/>
+            <a:off x="762000" y="13207454"/>
+            <a:ext cx="2268379" cy="175171"/>
           </a:xfrm>
           <a:prstGeom prst="rect">
             <a:avLst/>
@@ -4383,7 +4383,11 @@
           <a:bodyPr wrap="none" anchor="t" lIns="0" rIns="0" tIns="0" bIns="0"/>
           <a:lstStyle/>
           <a:p>
-            <a:pPr algn="l"/>
+            <a:pPr algn="l">
+              <a:lnSpc>
+                <a:spcPct val="92000"/>
+              </a:lnSpc>
+            </a:pPr>
             <a:r>
               <a:rPr sz="1500" i="1" b="0">
                 <a:solidFill>
